--- a/presentation/Блиц-запись_Отчет_по_гипотезам.pptx
+++ b/presentation/Блиц-запись_Отчет_по_гипотезам.pptx
@@ -11424,7 +11424,7 @@
           <a:p>
             <a:pPr algn="l"/>
             <a:r>
-              <a:rPr sz="2200" b="1">
+              <a:rPr sz="2400" b="1">
                 <a:solidFill>
                   <a:srgbClr val="FFFFFF"/>
                 </a:solidFill>
@@ -11432,7 +11432,7 @@
                 <a:ea typeface="Verdana"/>
                 <a:cs typeface="Verdana"/>
               </a:rPr>
-              <a:t>5. Гипотеза 3 — проверена (цифры ЦП)</a:t>
+              <a:t>5. Гипотеза 3 — проверена</a:t>
             </a:r>
           </a:p>
         </p:txBody>
@@ -11545,7 +11545,7 @@
         <p:spPr>
           <a:xfrm>
             <a:off x="886968" y="1234440"/>
-            <a:ext cx="10515600" cy="1691640"/>
+            <a:ext cx="10515600" cy="1417320"/>
           </a:xfrm>
           <a:prstGeom prst="roundRect">
             <a:avLst>
@@ -11626,8 +11626,8 @@
         </p:nvSpPr>
         <p:spPr>
           <a:xfrm>
-            <a:off x="1097280" y="1737360"/>
-            <a:ext cx="10058400" cy="1051560"/>
+            <a:off x="1097280" y="1691640"/>
+            <a:ext cx="10058400" cy="822960"/>
           </a:xfrm>
           <a:prstGeom prst="rect">
             <a:avLst/>
@@ -11663,7 +11663,7 @@
         </p:nvSpPr>
         <p:spPr>
           <a:xfrm>
-            <a:off x="886968" y="3108960"/>
+            <a:off x="886968" y="2834640"/>
             <a:ext cx="10515600" cy="320040"/>
           </a:xfrm>
           <a:prstGeom prst="rect">
@@ -11687,7 +11687,7 @@
                 <a:ea typeface="Verdana"/>
                 <a:cs typeface="Verdana"/>
               </a:rPr>
-              <a:t>Распределение прозвоненных по текущему сервису — заполняет ЦП</a:t>
+              <a:t>Распределение прозвоненных по текущему сервису записи</a:t>
             </a:r>
           </a:p>
         </p:txBody>
@@ -11701,8 +11701,8 @@
           <p:nvPr/>
         </p:nvGraphicFramePr>
         <p:xfrm>
-          <a:off x="886968" y="3520440"/>
-          <a:ext cx="10515600" cy="2286000"/>
+          <a:off x="886968" y="3200400"/>
+          <a:ext cx="10515600" cy="2148840"/>
         </p:xfrm>
         <a:graphic>
           <a:graphicData uri="http://schemas.openxmlformats.org/drawingml/2006/table">
@@ -11717,7 +11717,7 @@
                 <a:gridCol w="1828800"/>
                 <a:gridCol w="2286000"/>
               </a:tblGrid>
-              <a:tr h="457200">
+              <a:tr h="429768">
                 <a:tc>
                   <a:txBody>
                     <a:bodyPr/>
@@ -11844,7 +11844,7 @@
                   </a:tcPr>
                 </a:tc>
               </a:tr>
-              <a:tr h="457200">
+              <a:tr h="429768">
                 <a:tc>
                   <a:txBody>
                     <a:bodyPr/>
@@ -11885,7 +11885,7 @@
                           <a:ea typeface="Verdana"/>
                           <a:cs typeface="Verdana"/>
                         </a:rPr>
-                        <a:t/>
+                        <a:t>32</a:t>
                       </a:r>
                     </a:p>
                   </a:txBody>
@@ -11910,7 +11910,7 @@
                           <a:ea typeface="Verdana"/>
                           <a:cs typeface="Verdana"/>
                         </a:rPr>
-                        <a:t/>
+                        <a:t>0</a:t>
                       </a:r>
                     </a:p>
                   </a:txBody>
@@ -11935,7 +11935,7 @@
                           <a:ea typeface="Verdana"/>
                           <a:cs typeface="Verdana"/>
                         </a:rPr>
-                        <a:t/>
+                        <a:t>4</a:t>
                       </a:r>
                     </a:p>
                   </a:txBody>
@@ -11960,7 +11960,7 @@
                           <a:ea typeface="Verdana"/>
                           <a:cs typeface="Verdana"/>
                         </a:rPr>
-                        <a:t/>
+                        <a:t>0,0%</a:t>
                       </a:r>
                     </a:p>
                   </a:txBody>
@@ -11971,7 +11971,7 @@
                   </a:tcPr>
                 </a:tc>
               </a:tr>
-              <a:tr h="457200">
+              <a:tr h="429768">
                 <a:tc>
                   <a:txBody>
                     <a:bodyPr/>
@@ -12012,7 +12012,7 @@
                           <a:ea typeface="Verdana"/>
                           <a:cs typeface="Verdana"/>
                         </a:rPr>
-                        <a:t/>
+                        <a:t>22</a:t>
                       </a:r>
                     </a:p>
                   </a:txBody>
@@ -12037,7 +12037,7 @@
                           <a:ea typeface="Verdana"/>
                           <a:cs typeface="Verdana"/>
                         </a:rPr>
-                        <a:t/>
+                        <a:t>1</a:t>
                       </a:r>
                     </a:p>
                   </a:txBody>
@@ -12062,7 +12062,7 @@
                           <a:ea typeface="Verdana"/>
                           <a:cs typeface="Verdana"/>
                         </a:rPr>
-                        <a:t/>
+                        <a:t>5</a:t>
                       </a:r>
                     </a:p>
                   </a:txBody>
@@ -12087,7 +12087,7 @@
                           <a:ea typeface="Verdana"/>
                           <a:cs typeface="Verdana"/>
                         </a:rPr>
-                        <a:t/>
+                        <a:t>4,5%</a:t>
                       </a:r>
                     </a:p>
                   </a:txBody>
@@ -12098,7 +12098,7 @@
                   </a:tcPr>
                 </a:tc>
               </a:tr>
-              <a:tr h="457200">
+              <a:tr h="429768">
                 <a:tc>
                   <a:txBody>
                     <a:bodyPr/>
@@ -12139,7 +12139,7 @@
                           <a:ea typeface="Verdana"/>
                           <a:cs typeface="Verdana"/>
                         </a:rPr>
-                        <a:t/>
+                        <a:t>12</a:t>
                       </a:r>
                     </a:p>
                   </a:txBody>
@@ -12164,7 +12164,7 @@
                           <a:ea typeface="Verdana"/>
                           <a:cs typeface="Verdana"/>
                         </a:rPr>
-                        <a:t/>
+                        <a:t>0</a:t>
                       </a:r>
                     </a:p>
                   </a:txBody>
@@ -12189,7 +12189,7 @@
                           <a:ea typeface="Verdana"/>
                           <a:cs typeface="Verdana"/>
                         </a:rPr>
-                        <a:t/>
+                        <a:t>2</a:t>
                       </a:r>
                     </a:p>
                   </a:txBody>
@@ -12214,7 +12214,7 @@
                           <a:ea typeface="Verdana"/>
                           <a:cs typeface="Verdana"/>
                         </a:rPr>
-                        <a:t/>
+                        <a:t>0,0%</a:t>
                       </a:r>
                     </a:p>
                   </a:txBody>
@@ -12225,7 +12225,7 @@
                   </a:tcPr>
                 </a:tc>
               </a:tr>
-              <a:tr h="457200">
+              <a:tr h="429768">
                 <a:tc>
                   <a:txBody>
                     <a:bodyPr/>
@@ -12266,7 +12266,7 @@
                           <a:ea typeface="Verdana"/>
                           <a:cs typeface="Verdana"/>
                         </a:rPr>
-                        <a:t/>
+                        <a:t>66</a:t>
                       </a:r>
                     </a:p>
                   </a:txBody>
@@ -12291,7 +12291,7 @@
                           <a:ea typeface="Verdana"/>
                           <a:cs typeface="Verdana"/>
                         </a:rPr>
-                        <a:t/>
+                        <a:t>1</a:t>
                       </a:r>
                     </a:p>
                   </a:txBody>
@@ -12316,7 +12316,7 @@
                           <a:ea typeface="Verdana"/>
                           <a:cs typeface="Verdana"/>
                         </a:rPr>
-                        <a:t/>
+                        <a:t>11</a:t>
                       </a:r>
                     </a:p>
                   </a:txBody>
@@ -12341,7 +12341,7 @@
                           <a:ea typeface="Verdana"/>
                           <a:cs typeface="Verdana"/>
                         </a:rPr>
-                        <a:t/>
+                        <a:t>1,5%</a:t>
                       </a:r>
                     </a:p>
                   </a:txBody>
@@ -12356,6 +12356,43 @@
           </a:graphicData>
         </a:graphic>
       </p:graphicFrame>
+      <p:sp>
+        <p:nvSpPr>
+          <p:cNvPr id="11" name="TextBox 10"/>
+          <p:cNvSpPr txBox="1"/>
+          <p:nvPr/>
+        </p:nvSpPr>
+        <p:spPr>
+          <a:xfrm>
+            <a:off x="886968" y="5532120"/>
+            <a:ext cx="10515600" cy="640080"/>
+          </a:xfrm>
+          <a:prstGeom prst="rect">
+            <a:avLst/>
+          </a:prstGeom>
+          <a:noFill/>
+        </p:spPr>
+        <p:txBody>
+          <a:bodyPr wrap="square" anchor="t">
+            <a:spAutoFit/>
+          </a:bodyPr>
+          <a:lstStyle/>
+          <a:p>
+            <a:pPr algn="l"/>
+            <a:r>
+              <a:rPr sz="1100" b="0">
+                <a:solidFill>
+                  <a:srgbClr val="BFBFBF"/>
+                </a:solidFill>
+                <a:latin typeface="Verdana"/>
+                <a:ea typeface="Verdana"/>
+                <a:cs typeface="Verdana"/>
+              </a:rPr>
+              <a:t>Пользователь сервиса: явная отметка в стадии канбана или ссылка на онлайн-запись этого сервиса в карточке лида (dikidi / yclients / mst.link). Демо — проведённая демонстрация по тексту стадии. Сделка — стадия «сконвертирован» или «оценка готовности к покупке». Конверсия в демо = демо ÷ прозвонено.</a:t>
+            </a:r>
+          </a:p>
+        </p:txBody>
+      </p:sp>
     </p:spTree>
   </p:cSld>
   <p:clrMapOvr>
